--- a/research/honduras/slides/Honduras_yield_drivers_forecast.pptx
+++ b/research/honduras/slides/Honduras_yield_drivers_forecast.pptx
@@ -1916,9 +1916,9 @@
           <c:invertIfNegative val="0"/>
           <c:cat>
             <c:strRef>
-              <c:f>Sheet1!$A$2:$A$19</c:f>
+              <c:f>Sheet1!$A$2:$A$21</c:f>
               <c:strCache>
-                <c:ptCount val="18"/>
+                <c:ptCount val="20"/>
                 <c:pt idx="0">
                   <c:v>05/06</c:v>
                 </c:pt>
@@ -1972,16 +1972,22 @@
                 </c:pt>
                 <c:pt idx="17">
                   <c:v>22/23</c:v>
+                </c:pt>
+                <c:pt idx="18">
+                  <c:v>23/24</c:v>
+                </c:pt>
+                <c:pt idx="19">
+                  <c:v>24/25</c:v>
                 </c:pt>
               </c:strCache>
             </c:strRef>
           </c:cat>
           <c:val>
             <c:numRef>
-              <c:f>Sheet1!$B$2:$B$19</c:f>
+              <c:f>Sheet1!$B$2:$B$21</c:f>
               <c:numCache>
                 <c:formatCode>General</c:formatCode>
-                <c:ptCount val="18"/>
+                <c:ptCount val="20"/>
                 <c:pt idx="0">
                   <c:v>59.24305819703308</c:v>
                 </c:pt>
@@ -2035,6 +2041,12 @@
                 </c:pt>
                 <c:pt idx="17">
                   <c:v>-0.0028607392150159505</c:v>
+                </c:pt>
+                <c:pt idx="18">
+                  <c:v>-0.4176798741238774</c:v>
+                </c:pt>
+                <c:pt idx="19">
+                  <c:v>2.3011290183573285</c:v>
                 </c:pt>
               </c:numCache>
             </c:numRef>
@@ -2062,9 +2074,9 @@
           <c:invertIfNegative val="0"/>
           <c:cat>
             <c:strRef>
-              <c:f>Sheet1!$A$2:$A$19</c:f>
+              <c:f>Sheet1!$A$2:$A$21</c:f>
               <c:strCache>
-                <c:ptCount val="18"/>
+                <c:ptCount val="20"/>
                 <c:pt idx="0">
                   <c:v>05/06</c:v>
                 </c:pt>
@@ -2118,16 +2130,22 @@
                 </c:pt>
                 <c:pt idx="17">
                   <c:v>22/23</c:v>
+                </c:pt>
+                <c:pt idx="18">
+                  <c:v>23/24</c:v>
+                </c:pt>
+                <c:pt idx="19">
+                  <c:v>24/25</c:v>
                 </c:pt>
               </c:strCache>
             </c:strRef>
           </c:cat>
           <c:val>
             <c:numRef>
-              <c:f>Sheet1!$C$2:$C$19</c:f>
+              <c:f>Sheet1!$C$2:$C$21</c:f>
               <c:numCache>
                 <c:formatCode>General</c:formatCode>
-                <c:ptCount val="18"/>
+                <c:ptCount val="20"/>
                 <c:pt idx="0">
                   <c:v>24.427184466019412</c:v>
                 </c:pt>
@@ -2181,6 +2199,12 @@
                 </c:pt>
                 <c:pt idx="17">
                   <c:v>18.75</c:v>
+                </c:pt>
+                <c:pt idx="18">
+                  <c:v>-11.403508771929827</c:v>
+                </c:pt>
+                <c:pt idx="19">
+                  <c:v>2.970297029702973</c:v>
                 </c:pt>
               </c:numCache>
             </c:numRef>
@@ -4790,7 +4814,7 @@
                 <a:latin typeface="Arial"/>
                 <a:cs typeface="Arial"/>
               </a:rPr>
-              <a:t>0,01</a:t>
+              <a:t>0,00</a:t>
             </a:r>
           </a:p>
         </p:txBody>
@@ -5672,7 +5696,7 @@
                 <a:latin typeface="Arial"/>
                 <a:cs typeface="Arial"/>
               </a:rPr>
-              <a:t>0,25</a:t>
+              <a:t>0,26</a:t>
             </a:r>
           </a:p>
         </p:txBody>
@@ -5917,7 +5941,7 @@
                 <a:latin typeface="Arial"/>
                 <a:cs typeface="Arial"/>
               </a:rPr>
-              <a:t>0,030</a:t>
+              <a:t>0,027</a:t>
             </a:r>
           </a:p>
         </p:txBody>
@@ -5966,7 +5990,7 @@
                 <a:latin typeface="Arial"/>
                 <a:cs typeface="Arial"/>
               </a:rPr>
-              <a:t>0,30</a:t>
+              <a:t>0,27</a:t>
             </a:r>
           </a:p>
         </p:txBody>
@@ -6211,7 +6235,7 @@
                 <a:latin typeface="Arial"/>
                 <a:cs typeface="Arial"/>
               </a:rPr>
-              <a:t>0,036</a:t>
+              <a:t>0,034</a:t>
             </a:r>
           </a:p>
         </p:txBody>
@@ -6260,7 +6284,7 @@
                 <a:latin typeface="Arial"/>
                 <a:cs typeface="Arial"/>
               </a:rPr>
-              <a:t>0,32</a:t>
+              <a:t>0,31</a:t>
             </a:r>
           </a:p>
         </p:txBody>
@@ -6505,7 +6529,7 @@
                 <a:latin typeface="Arial"/>
                 <a:cs typeface="Arial"/>
               </a:rPr>
-              <a:t>0,200</a:t>
+              <a:t>0,201</a:t>
             </a:r>
           </a:p>
         </p:txBody>
@@ -6652,7 +6676,7 @@
                 <a:latin typeface="Arial"/>
                 <a:cs typeface="Arial"/>
               </a:rPr>
-              <a:t>Rain Jun–Oct (fruit fill)</a:t>
+              <a:t>Rain Apr–May (flowering, fruit set)</a:t>
             </a:r>
           </a:p>
         </p:txBody>
@@ -6750,7 +6774,7 @@
                 <a:latin typeface="Arial"/>
                 <a:cs typeface="Arial"/>
               </a:rPr>
-              <a:t>0,10</a:t>
+              <a:t>−0,10</a:t>
             </a:r>
           </a:p>
         </p:txBody>
@@ -6799,7 +6823,7 @@
                 <a:latin typeface="Arial"/>
                 <a:cs typeface="Arial"/>
               </a:rPr>
-              <a:t>0,507</a:t>
+              <a:t>0,509</a:t>
             </a:r>
           </a:p>
         </p:txBody>
@@ -6946,7 +6970,7 @@
                 <a:latin typeface="Arial"/>
                 <a:cs typeface="Arial"/>
               </a:rPr>
-              <a:t>Rain Apr–May (flowering, fruit set)</a:t>
+              <a:t>Rain Jun–Oct (fruit fill)</a:t>
             </a:r>
           </a:p>
         </p:txBody>
@@ -7044,7 +7068,7 @@
                 <a:latin typeface="Arial"/>
                 <a:cs typeface="Arial"/>
               </a:rPr>
-              <a:t>−0,10</a:t>
+              <a:t>0,10</a:t>
             </a:r>
           </a:p>
         </p:txBody>
@@ -7093,7 +7117,7 @@
                 <a:latin typeface="Arial"/>
                 <a:cs typeface="Arial"/>
               </a:rPr>
-              <a:t>0,509</a:t>
+              <a:t>0,517</a:t>
             </a:r>
           </a:p>
         </p:txBody>
@@ -7387,7 +7411,7 @@
                 <a:latin typeface="Arial"/>
                 <a:cs typeface="Arial"/>
               </a:rPr>
-              <a:t>0,628</a:t>
+              <a:t>0,622</a:t>
             </a:r>
           </a:p>
         </p:txBody>
@@ -7681,7 +7705,7 @@
                 <a:latin typeface="Arial"/>
                 <a:cs typeface="Arial"/>
               </a:rPr>
-              <a:t>0,652</a:t>
+              <a:t>0,644</a:t>
             </a:r>
           </a:p>
         </p:txBody>
@@ -7975,7 +7999,7 @@
                 <a:latin typeface="Arial"/>
                 <a:cs typeface="Arial"/>
               </a:rPr>
-              <a:t>0,859</a:t>
+              <a:t>0,855</a:t>
             </a:r>
           </a:p>
         </p:txBody>
@@ -8269,7 +8293,7 @@
                 <a:latin typeface="Arial"/>
                 <a:cs typeface="Arial"/>
               </a:rPr>
-              <a:t>0,951</a:t>
+              <a:t>0,944</a:t>
             </a:r>
           </a:p>
         </p:txBody>
@@ -8563,7 +8587,7 @@
                 <a:latin typeface="Arial"/>
                 <a:cs typeface="Arial"/>
               </a:rPr>
-              <a:t>0,955</a:t>
+              <a:t>0,958</a:t>
             </a:r>
           </a:p>
         </p:txBody>
@@ -8857,7 +8881,7 @@
                 <a:latin typeface="Arial"/>
                 <a:cs typeface="Arial"/>
               </a:rPr>
-              <a:t>0,003</a:t>
+              <a:t>0,002</a:t>
             </a:r>
           </a:p>
         </p:txBody>
@@ -9399,7 +9423,7 @@
                 <a:latin typeface="Arial"/>
                 <a:cs typeface="Arial"/>
               </a:rPr>
-              <a:t>Tests: research/honduras/yield_drivers/analysis.py and robustness.py. r = Pearson correlation of year-on-year log changes; p = 5 000 random shuffles; Holm = correction for 14 tests. USDA PSD (production, 1 000 60-kg bags, crop year Oct–Sep, July 2026 download); FAOSTAT nitrogen use (all crops, 2004–2022); World Bank Pink Sheet; GPCC rain at 3 coffee towns; NOAA ONI; NASA POWER; ERA5-Land max. temperature at 10 coffee points. Bono: USDA GAIN 2021.</a:t>
+              <a:t>Tests: research/honduras/yield_drivers/analysis.py and robustness.py. r = Pearson correlation of year-on-year log changes; p = 5 000 random shuffles; Holm = correction for 14 tests. USDA PSD (production, 1 000 60-kg bags, crop year Oct–Sep, July 2026 download); FAOSTAT nitrogen use (all crops, 2004–2024); World Bank Pink Sheet; GPCC rain at 3 coffee towns; NOAA ONI; NASA POWER; ERA5-Land max. temperature at 10 coffee points. Bono: USDA GAIN 2021.</a:t>
             </a:r>
           </a:p>
         </p:txBody>
@@ -13630,7 +13654,7 @@
                 <a:latin typeface="Arial"/>
                 <a:cs typeface="Arial"/>
               </a:rPr>
-              <a:t>What moves nitrogen use? (2005–2022)</a:t>
+              <a:t>What moves nitrogen use? (2005–2024)</a:t>
             </a:r>
           </a:p>
         </p:txBody>
@@ -14071,7 +14095,7 @@
                 <a:latin typeface="Arial"/>
                 <a:cs typeface="Arial"/>
               </a:rPr>
-              <a:t>0,791</a:t>
+              <a:t>0,769</a:t>
             </a:r>
           </a:p>
         </p:txBody>
@@ -14218,7 +14242,7 @@
                 <a:latin typeface="Arial"/>
                 <a:cs typeface="Arial"/>
               </a:rPr>
-              <a:t>0,247</a:t>
+              <a:t>0,244</a:t>
             </a:r>
           </a:p>
         </p:txBody>
@@ -14316,7 +14340,7 @@
                 <a:latin typeface="Arial"/>
                 <a:cs typeface="Arial"/>
               </a:rPr>
-              <a:t>0,23</a:t>
+              <a:t>0,18</a:t>
             </a:r>
           </a:p>
         </p:txBody>
@@ -14365,7 +14389,7 @@
                 <a:latin typeface="Arial"/>
                 <a:cs typeface="Arial"/>
               </a:rPr>
-              <a:t>0,369</a:t>
+              <a:t>0,451</a:t>
             </a:r>
           </a:p>
         </p:txBody>
@@ -14463,7 +14487,7 @@
                 <a:latin typeface="Arial"/>
                 <a:cs typeface="Arial"/>
               </a:rPr>
-              <a:t>−0,03</a:t>
+              <a:t>0,02</a:t>
             </a:r>
           </a:p>
         </p:txBody>
@@ -14512,7 +14536,7 @@
                 <a:latin typeface="Arial"/>
                 <a:cs typeface="Arial"/>
               </a:rPr>
-              <a:t>0,915</a:t>
+              <a:t>0,950</a:t>
             </a:r>
           </a:p>
         </p:txBody>
@@ -14659,7 +14683,7 @@
                 <a:latin typeface="Arial"/>
                 <a:cs typeface="Arial"/>
               </a:rPr>
-              <a:t>0,057</a:t>
+              <a:t>0,055</a:t>
             </a:r>
           </a:p>
         </p:txBody>
@@ -14750,7 +14774,7 @@
                 <a:latin typeface="Arial"/>
                 <a:cs typeface="Arial"/>
               </a:rPr>
-              <a:t>FAOSTAT stops in 2022: for 2026 watch fertiliser imports and the urea price (+33 % in Jan–Aug 2026).</a:t>
+              <a:t>FAOSTAT runs to 2024 (2022 imputed): for 2025–26 watch fertiliser imports and the urea price (+33 % in Jan–Aug 2026).</a:t>
             </a:r>
           </a:p>
         </p:txBody>
@@ -17668,7 +17692,7 @@
                 <a:latin typeface="Arial"/>
                 <a:cs typeface="Arial"/>
               </a:rPr>
-              <a:t>0,51</a:t>
+              <a:t>0,52</a:t>
             </a:r>
           </a:p>
         </p:txBody>
@@ -17962,7 +17986,7 @@
                 <a:latin typeface="Arial"/>
                 <a:cs typeface="Arial"/>
               </a:rPr>
-              <a:t>0,95</a:t>
+              <a:t>0,94</a:t>
             </a:r>
           </a:p>
         </p:txBody>
@@ -18109,7 +18133,7 @@
                 <a:latin typeface="Arial"/>
                 <a:cs typeface="Arial"/>
               </a:rPr>
-              <a:t>0,285</a:t>
+              <a:t>0,303</a:t>
             </a:r>
           </a:p>
         </p:txBody>
@@ -18256,7 +18280,7 @@
                 <a:latin typeface="Arial"/>
                 <a:cs typeface="Arial"/>
               </a:rPr>
-              <a:t>0,053</a:t>
+              <a:t>0,048</a:t>
             </a:r>
           </a:p>
         </p:txBody>
@@ -18403,7 +18427,7 @@
                 <a:latin typeface="Arial"/>
                 <a:cs typeface="Arial"/>
               </a:rPr>
-              <a:t>0,003</a:t>
+              <a:t>0,002</a:t>
             </a:r>
           </a:p>
         </p:txBody>
@@ -18550,7 +18574,7 @@
                 <a:latin typeface="Arial"/>
                 <a:cs typeface="Arial"/>
               </a:rPr>
-              <a:t>0,006</a:t>
+              <a:t>0,009</a:t>
             </a:r>
           </a:p>
         </p:txBody>
